--- a/docs/presentations/registration_test_procedure.pptx
+++ b/docs/presentations/registration_test_procedure.pptx
@@ -122,7 +122,7 @@
   <p:extLst>
     <p:ext uri="{521415D9-36F7-43E2-AB2F-B90AF26B5E84}">
       <p14:sectionLst xmlns:p14="http://schemas.microsoft.com/office/powerpoint/2010/main">
-        <p14:section name="Introduction" id="{a38d3aec-18a4-b27c-ec60-97761b709dca}">
+        <p14:section name="Introduction" id="{642cb22e-f979-0d29-0c6d-36fba2ac5813}">
           <p14:sldIdLst>
             <p14:sldId id="256"/>
             <p14:sldId id="257"/>
@@ -131,13 +131,13 @@
             <p14:sldId id="260"/>
           </p14:sldIdLst>
         </p14:section>
-        <p14:section name="Setup" id="{6e004ef1-13c7-1cd2-3911-af3c1ae7b338}">
+        <p14:section name="Setup" id="{a66490c6-c1ae-005c-11f0-9b05e0c74f8a}">
           <p14:sldIdLst>
             <p14:sldId id="261"/>
             <p14:sldId id="262"/>
           </p14:sldIdLst>
         </p14:section>
-        <p14:section name="Capture" id="{e99f4821-776c-0d90-b701-5bd2f8fdbf38}">
+        <p14:section name="Capture" id="{25f8ce3e-bd65-7b4d-bf66-adac07edfe70}">
           <p14:sldIdLst>
             <p14:sldId id="263"/>
             <p14:sldId id="264"/>
@@ -146,13 +146,13 @@
             <p14:sldId id="267"/>
           </p14:sldIdLst>
         </p14:section>
-        <p14:section name="Checks" id="{d0a487b3-246a-f27a-759e-c20dfef7c3ef}">
+        <p14:section name="Checks" id="{32432a2a-a843-c818-59b0-a6177b31353c}">
           <p14:sldIdLst>
             <p14:sldId id="268"/>
             <p14:sldId id="269"/>
           </p14:sldIdLst>
         </p14:section>
-        <p14:section name="Wrap-up" id="{a607804b-86d3-09f7-4800-e8b217b28001}">
+        <p14:section name="Wrap-up" id="{8bf55d72-9734-bcfe-e3bf-26ad6b36a16d}">
           <p14:sldIdLst>
             <p14:sldId id="270"/>
             <p14:sldId id="271"/>
@@ -1618,7 +1618,7 @@
           <a:p>
             <a:r>
               <a:rPr lang="en-US" dirty="0"/>
-              <a:t>The board's pose is reported by the robot, not fitted, so its frame must be right: the registration takes the reported frame's z axis as the board normal and its origin as a point on the front face. The run-out check tests whether the board face is perpendicular to the flange axis; if the reading wanders, the adapter is shimmed. D is the distance from the flange face to the front face, measured at four places; the tool frame is defined at (0, 0, D) from the flange. An error in x only rotates the frame within the board plane, which the registration does not use; an error in z tilts the normal and shows as a residual on every pose. If the controller cannot define a tool frame, the flange pose is logged instead and the tools are given D with the target-offset option (procedure section 3).</a:t>
+              <a:t>The board's pose is reported by the robot, not fitted, so its frame must be right: the registration takes the reported frame's z axis as the board normal and its origin as a point on the front face. The run-out check tests whether the board face is perpendicular to the flange axis; if the reading wanders, the adapter is shimmed. D is the distance from the flange face to the front face, measured at four places; the tool frame is defined at (0, 0, D) from the flange. An error in x only rotates the frame within the board plane, which the registration does not use; an error in z tilts the normal and shows as a residual on every pose. If the controller cannot define a tool frame, the flange pose is logged instead and the tools are given D with the target-offset option (procedure section 3). A remount is verified, not assumed (section 3, remount check): the run-out and D measurements are repeated, and the first bootstrap pose, saved on the controller as a named position, is captured again so that the bootstrap shows the before-and-after residuals side by side. A tilt or a change of D matters; a shift within the board's own plane does not. A remount between the two sub-procedures is recorded, because their comparison assumes an unchanged board.</a:t>
             </a:r>
             <a:endParaRPr lang="en-US" dirty="0"/>
           </a:p>
@@ -6999,7 +6999,7 @@
                   <a:schemeClr val="tx1"/>
                 </a:solidFill>
               </a:rPr>
-              <a:t>A loose adapter: check the dowels and the run-out before each run</a:t>
+              <a:t>A loose adapter, or a remount that did not go back: do the remount check after any remount</a:t>
             </a:r>
             <a:endParaRPr lang="en-US" sz="1600" dirty="0"/>
           </a:p>
@@ -11674,7 +11674,7 @@
         </p:nvSpPr>
         <p:spPr>
           <a:xfrm>
-            <a:off x="6949440" y="1584960"/>
+            <a:off x="6949440" y="1487170"/>
             <a:ext cx="411480" cy="411480"/>
           </a:xfrm>
           <a:prstGeom prst="ellipse">
@@ -11702,7 +11702,7 @@
         </p:blipFill>
         <p:spPr>
           <a:xfrm>
-            <a:off x="7052310" y="1687830"/>
+            <a:off x="7052310" y="1590040"/>
             <a:ext cx="205740" cy="205740"/>
           </a:xfrm>
           <a:prstGeom prst="rect">
@@ -11719,7 +11719,7 @@
         <p:spPr>
           <a:xfrm>
             <a:off x="7543800" y="1417320"/>
-            <a:ext cx="4190695" cy="746760"/>
+            <a:ext cx="4190695" cy="551180"/>
           </a:xfrm>
           <a:prstGeom prst="rect">
             <a:avLst/>
@@ -11754,7 +11754,7 @@
         </p:nvSpPr>
         <p:spPr>
           <a:xfrm>
-            <a:off x="6949440" y="2514600"/>
+            <a:off x="6949440" y="2221230"/>
             <a:ext cx="411480" cy="411480"/>
           </a:xfrm>
           <a:prstGeom prst="ellipse">
@@ -11782,7 +11782,7 @@
         </p:blipFill>
         <p:spPr>
           <a:xfrm>
-            <a:off x="7052310" y="2617470"/>
+            <a:off x="7052310" y="2324100"/>
             <a:ext cx="205740" cy="205740"/>
           </a:xfrm>
           <a:prstGeom prst="rect">
@@ -11798,8 +11798,8 @@
         </p:nvSpPr>
         <p:spPr>
           <a:xfrm>
-            <a:off x="7543800" y="2346960"/>
-            <a:ext cx="4190695" cy="746760"/>
+            <a:off x="7543800" y="2151380"/>
+            <a:ext cx="4190695" cy="551180"/>
           </a:xfrm>
           <a:prstGeom prst="rect">
             <a:avLst/>
@@ -11834,7 +11834,7 @@
         </p:nvSpPr>
         <p:spPr>
           <a:xfrm>
-            <a:off x="6949440" y="3566160"/>
+            <a:off x="6949440" y="3077210"/>
             <a:ext cx="411480" cy="411480"/>
           </a:xfrm>
           <a:prstGeom prst="ellipse">
@@ -11862,7 +11862,7 @@
         </p:blipFill>
         <p:spPr>
           <a:xfrm>
-            <a:off x="7052310" y="3669030"/>
+            <a:off x="7052310" y="3180080"/>
             <a:ext cx="205740" cy="205740"/>
           </a:xfrm>
           <a:prstGeom prst="rect">
@@ -11878,8 +11878,8 @@
         </p:nvSpPr>
         <p:spPr>
           <a:xfrm>
-            <a:off x="7543800" y="3276600"/>
-            <a:ext cx="4190695" cy="990600"/>
+            <a:off x="7543800" y="2885440"/>
+            <a:ext cx="4190695" cy="795020"/>
           </a:xfrm>
           <a:prstGeom prst="rect">
             <a:avLst/>
@@ -11914,7 +11914,7 @@
         </p:nvSpPr>
         <p:spPr>
           <a:xfrm>
-            <a:off x="6949440" y="4617720"/>
+            <a:off x="6949440" y="3933190"/>
             <a:ext cx="411480" cy="411480"/>
           </a:xfrm>
           <a:prstGeom prst="ellipse">
@@ -11942,7 +11942,7 @@
         </p:blipFill>
         <p:spPr>
           <a:xfrm>
-            <a:off x="7052310" y="4720590"/>
+            <a:off x="7052310" y="4036060"/>
             <a:ext cx="205740" cy="205740"/>
           </a:xfrm>
           <a:prstGeom prst="rect">
@@ -11958,8 +11958,8 @@
         </p:nvSpPr>
         <p:spPr>
           <a:xfrm>
-            <a:off x="7543800" y="4450080"/>
-            <a:ext cx="4190695" cy="746760"/>
+            <a:off x="7543800" y="3863340"/>
+            <a:ext cx="4190695" cy="551180"/>
           </a:xfrm>
           <a:prstGeom prst="rect">
             <a:avLst/>
@@ -11994,7 +11994,7 @@
         </p:nvSpPr>
         <p:spPr>
           <a:xfrm>
-            <a:off x="6949440" y="5547360"/>
+            <a:off x="6949440" y="4667250"/>
             <a:ext cx="411480" cy="411480"/>
           </a:xfrm>
           <a:prstGeom prst="ellipse">
@@ -12022,7 +12022,7 @@
         </p:blipFill>
         <p:spPr>
           <a:xfrm>
-            <a:off x="7052310" y="5650230"/>
+            <a:off x="7052310" y="4770120"/>
             <a:ext cx="205740" cy="205740"/>
           </a:xfrm>
           <a:prstGeom prst="rect">
@@ -12038,8 +12038,8 @@
         </p:nvSpPr>
         <p:spPr>
           <a:xfrm>
-            <a:off x="7543800" y="5379720"/>
-            <a:ext cx="4190695" cy="746760"/>
+            <a:off x="7543800" y="4597400"/>
+            <a:ext cx="4190695" cy="551180"/>
           </a:xfrm>
           <a:prstGeom prst="rect">
             <a:avLst/>
@@ -12061,6 +12061,86 @@
                 </a:solidFill>
               </a:rPr>
               <a:t>Save as TOOL_BOARD with its load data; record D, the run-out and the board size</a:t>
+            </a:r>
+            <a:endParaRPr lang="en-US" sz="1600" dirty="0"/>
+          </a:p>
+        </p:txBody>
+      </p:sp>
+      <p:sp>
+        <p:nvSpPr>
+          <p:cNvPr id="20" name="Board point icon 6 circle"/>
+          <p:cNvSpPr/>
+          <p:nvPr/>
+        </p:nvSpPr>
+        <p:spPr>
+          <a:xfrm>
+            <a:off x="6949440" y="5523230"/>
+            <a:ext cx="411480" cy="411480"/>
+          </a:xfrm>
+          <a:prstGeom prst="ellipse">
+            <a:avLst/>
+          </a:prstGeom>
+          <a:solidFill>
+            <a:schemeClr val="accent2"/>
+          </a:solidFill>
+          <a:ln/>
+        </p:spPr>
+      </p:sp>
+      <p:pic>
+        <p:nvPicPr>
+          <p:cNvPr id="21" name="Board point icon 6 glyph" descr="check icon">    </p:cNvPr>
+          <p:cNvPicPr>
+            <a:picLocks noChangeAspect="1"/>
+          </p:cNvPicPr>
+          <p:nvPr/>
+        </p:nvPicPr>
+        <p:blipFill>
+          <a:blip r:embed="rId7"/>
+          <a:stretch>
+            <a:fillRect/>
+          </a:stretch>
+        </p:blipFill>
+        <p:spPr>
+          <a:xfrm>
+            <a:off x="7052310" y="5626100"/>
+            <a:ext cx="205740" cy="205740"/>
+          </a:xfrm>
+          <a:prstGeom prst="rect">
+            <a:avLst/>
+          </a:prstGeom>
+        </p:spPr>
+      </p:pic>
+      <p:sp>
+        <p:nvSpPr>
+          <p:cNvPr id="22" name="Board point text 6"/>
+          <p:cNvSpPr txBox="1"/>
+          <p:nvPr/>
+        </p:nvSpPr>
+        <p:spPr>
+          <a:xfrm>
+            <a:off x="7543800" y="5331460"/>
+            <a:ext cx="4190695" cy="795020"/>
+          </a:xfrm>
+          <a:prstGeom prst="rect">
+            <a:avLst/>
+          </a:prstGeom>
+          <a:noFill/>
+          <a:ln/>
+        </p:spPr>
+        <p:txBody>
+          <a:bodyPr wrap="square" lIns="0" tIns="0" rIns="0" bIns="0" rtlCol="0" anchor="ctr"/>
+          <a:lstStyle/>
+          <a:p>
+            <a:pPr algn="l" indent="0" marL="0">
+              <a:buNone/>
+            </a:pPr>
+            <a:r>
+              <a:rPr lang="en-US" sz="1600" dirty="0">
+                <a:solidFill>
+                  <a:schemeClr val="tx1"/>
+                </a:solidFill>
+              </a:rPr>
+              <a:t>After any remount: run-out and D again, and the saved reference pose captured again (procedure section 3)</a:t>
             </a:r>
             <a:endParaRPr lang="en-US" sz="1600" dirty="0"/>
           </a:p>

--- a/docs/presentations/registration_test_procedure.pptx
+++ b/docs/presentations/registration_test_procedure.pptx
@@ -122,7 +122,7 @@
   <p:extLst>
     <p:ext uri="{521415D9-36F7-43E2-AB2F-B90AF26B5E84}">
       <p14:sectionLst xmlns:p14="http://schemas.microsoft.com/office/powerpoint/2010/main">
-        <p14:section name="Introduction" id="{642cb22e-f979-0d29-0c6d-36fba2ac5813}">
+        <p14:section name="Introduction" id="{59ec3f54-7a9b-a682-0a0f-f0260a2a7d7f}">
           <p14:sldIdLst>
             <p14:sldId id="256"/>
             <p14:sldId id="257"/>
@@ -131,13 +131,13 @@
             <p14:sldId id="260"/>
           </p14:sldIdLst>
         </p14:section>
-        <p14:section name="Setup" id="{a66490c6-c1ae-005c-11f0-9b05e0c74f8a}">
+        <p14:section name="Setup" id="{7bdc8323-ac30-43df-b740-432420f8560f}">
           <p14:sldIdLst>
             <p14:sldId id="261"/>
             <p14:sldId id="262"/>
           </p14:sldIdLst>
         </p14:section>
-        <p14:section name="Capture" id="{25f8ce3e-bd65-7b4d-bf66-adac07edfe70}">
+        <p14:section name="Capture" id="{2cb5dd85-77cd-7c09-d2b9-b04a1ff37524}">
           <p14:sldIdLst>
             <p14:sldId id="263"/>
             <p14:sldId id="264"/>
@@ -146,13 +146,13 @@
             <p14:sldId id="267"/>
           </p14:sldIdLst>
         </p14:section>
-        <p14:section name="Checks" id="{32432a2a-a843-c818-59b0-a6177b31353c}">
+        <p14:section name="Checks" id="{40b9a029-fe32-74d8-f004-df59196257af}">
           <p14:sldIdLst>
             <p14:sldId id="268"/>
             <p14:sldId id="269"/>
           </p14:sldIdLst>
         </p14:section>
-        <p14:section name="Wrap-up" id="{8bf55d72-9734-bcfe-e3bf-26ad6b36a16d}">
+        <p14:section name="Wrap-up" id="{dde347da-9fae-74a6-2f7b-b497a55489f1}">
           <p14:sldIdLst>
             <p14:sldId id="270"/>
             <p14:sldId id="271"/>
@@ -1706,7 +1706,7 @@
           <a:p>
             <a:r>
               <a:rPr lang="en-US" dirty="0"/>
-              <a:t>The software determines the sensor's exact position from the full capture set; this step only needs a rough position so that the planned poses land inside the field of view and so that the software knows where to look for the board in each capture. Six hand-jogged poses, tilted in four directions and at two distances, are enough; the bootstrap also reports the normal spread of the six, which must reach 0.05 and is about 0.15 with these tilts. The result, boot.json, is read by the plan tool and the check tool. Procedure section 4 gives the steps and the commands; the words it uses for what the software reports, segmentation, plane residual, normal and offset residual, are defined there with figure 2.</a:t>
+              <a:t>The software determines the sensor's exact position from the full capture set; this step only needs a rough position so that the planned poses land inside the field of view and so that the software knows where to look for the board in each capture. Six hand-jogged poses, tilted in four directions and at two distances, are enough; the bootstrap also reports the normal spread of the six, which must reach 0.05 and is about 0.2 with these tilts. The result, boot.json, is read by the plan tool and the check tool. Procedure section 4 gives the steps and the commands; the words it uses for what the software reports, segmentation, plane residual, normal and offset residual, are defined there with figure 2.</a:t>
             </a:r>
             <a:endParaRPr lang="en-US" dirty="0"/>
           </a:p>

--- a/docs/presentations/registration_test_procedure.pptx
+++ b/docs/presentations/registration_test_procedure.pptx
@@ -122,7 +122,7 @@
   <p:extLst>
     <p:ext uri="{521415D9-36F7-43E2-AB2F-B90AF26B5E84}">
       <p14:sectionLst xmlns:p14="http://schemas.microsoft.com/office/powerpoint/2010/main">
-        <p14:section name="Introduction" id="{59ec3f54-7a9b-a682-0a0f-f0260a2a7d7f}">
+        <p14:section name="Introduction" id="{2838a710-7ea8-c819-7ec6-eb2f96c49e1b}">
           <p14:sldIdLst>
             <p14:sldId id="256"/>
             <p14:sldId id="257"/>
@@ -131,13 +131,13 @@
             <p14:sldId id="260"/>
           </p14:sldIdLst>
         </p14:section>
-        <p14:section name="Setup" id="{7bdc8323-ac30-43df-b740-432420f8560f}">
+        <p14:section name="Setup" id="{4517e5bb-8729-3ac3-7494-df02d3b8ea73}">
           <p14:sldIdLst>
             <p14:sldId id="261"/>
             <p14:sldId id="262"/>
           </p14:sldIdLst>
         </p14:section>
-        <p14:section name="Capture" id="{2cb5dd85-77cd-7c09-d2b9-b04a1ff37524}">
+        <p14:section name="Capture" id="{464a9f6f-83e4-fddc-685a-fbb2c4198615}">
           <p14:sldIdLst>
             <p14:sldId id="263"/>
             <p14:sldId id="264"/>
@@ -146,13 +146,13 @@
             <p14:sldId id="267"/>
           </p14:sldIdLst>
         </p14:section>
-        <p14:section name="Checks" id="{40b9a029-fe32-74d8-f004-df59196257af}">
+        <p14:section name="Checks" id="{cb972421-8a7c-c973-c728-0bde960d54b6}">
           <p14:sldIdLst>
             <p14:sldId id="268"/>
             <p14:sldId id="269"/>
           </p14:sldIdLst>
         </p14:section>
-        <p14:section name="Wrap-up" id="{dde347da-9fae-74a6-2f7b-b497a55489f1}">
+        <p14:section name="Wrap-up" id="{d8e274b5-d57c-b465-6f44-c8b1a76c6135}">
           <p14:sldIdLst>
             <p14:sldId id="270"/>
             <p14:sldId id="271"/>
@@ -1002,7 +1002,7 @@
           <a:p>
             <a:r>
               <a:rPr lang="en-US" dirty="0"/>
-              <a:t>The check tool prints one line per pose and a verdict, and writes a JSON report; its exit code is 0 when nothing is flagged, 1 when something is, and 2 when it cannot read the manifest. It runs on each folder as soon as its captures are complete, while the robot and the board are still set up, because that is when a flagged pose can be re-captured. It also reports the normal spread of the set, which should not fall below 0.05 with the plan's defaults. Section 8 of the procedure lists every flag and what it means. The thresholds are placeholders until the first real session sets them.</a:t>
+              <a:t>The check tool prints one line per pose and a verdict, and writes a JSON report; its exit code is 0 when nothing is flagged, 1 when something is, and 2 when it cannot read the manifest. It runs on each folder as soon as its captures are complete, while the robot and the board are still set up, because that is when a flagged pose can be re-captured. It also reports the normal spread of the set, which should not fall below 0.05 with the plan's defaults. Section 8 of the procedure lists every flag and what it means. The thresholds are placeholders until the first real session sets them. A board image of fewer than 1,000 pixels, typically the far standoff at the largest tilt, gives a noisy plane; the check flags it as too small and suppresses its residual flags, and the right response is to drop the pose from the plan rather than re-capture it. The 1,000 is a placeholder.</a:t>
             </a:r>
             <a:endParaRPr lang="en-US" dirty="0"/>
           </a:p>
@@ -5990,7 +5990,7 @@
                   <a:schemeClr val="tx2"/>
                 </a:solidFill>
               </a:rPr>
-              <a:t>Board not found or cut off</a:t>
+              <a:t>Board not found, cut off or too small</a:t>
             </a:r>
             <a:endParaRPr lang="en-US" sz="1600" dirty="0"/>
           </a:p>
@@ -6007,7 +6007,7 @@
                   <a:schemeClr val="accent1"/>
                 </a:solidFill>
               </a:rPr>
-              <a:t>segmentation failed; valid fraction below 50 percent; mask at the border</a:t>
+              <a:t>segmentation failed; valid fraction below 50 percent; mask at the border; under 1,000 pixels</a:t>
             </a:r>
             <a:endParaRPr lang="en-US" sz="1600" dirty="0"/>
           </a:p>
@@ -6021,7 +6021,7 @@
                   <a:schemeClr val="tx1"/>
                 </a:solidFill>
               </a:rPr>
-              <a:t>Pose copied wrongly, something flat closer than the board, the board outside the field, or exposure</a:t>
+              <a:t>Pose copied wrongly, something flat closer than the board, the board outside the field, or exposure. Too small: the pose is at the sensor's limit; drop it, do not re-capture</a:t>
             </a:r>
             <a:endParaRPr lang="en-US" sz="1600" dirty="0"/>
           </a:p>

--- a/docs/presentations/registration_test_procedure.pptx
+++ b/docs/presentations/registration_test_procedure.pptx
@@ -122,7 +122,7 @@
   <p:extLst>
     <p:ext uri="{521415D9-36F7-43E2-AB2F-B90AF26B5E84}">
       <p14:sectionLst xmlns:p14="http://schemas.microsoft.com/office/powerpoint/2010/main">
-        <p14:section name="Introduction" id="{2838a710-7ea8-c819-7ec6-eb2f96c49e1b}">
+        <p14:section name="Introduction" id="{087c1106-6966-ec04-73ed-8415dc5fc5ff}">
           <p14:sldIdLst>
             <p14:sldId id="256"/>
             <p14:sldId id="257"/>
@@ -131,13 +131,13 @@
             <p14:sldId id="260"/>
           </p14:sldIdLst>
         </p14:section>
-        <p14:section name="Setup" id="{4517e5bb-8729-3ac3-7494-df02d3b8ea73}">
+        <p14:section name="Setup" id="{b802a50b-3f73-7159-80e0-680be0bd36a0}">
           <p14:sldIdLst>
             <p14:sldId id="261"/>
             <p14:sldId id="262"/>
           </p14:sldIdLst>
         </p14:section>
-        <p14:section name="Capture" id="{464a9f6f-83e4-fddc-685a-fbb2c4198615}">
+        <p14:section name="Capture" id="{4db34bf4-0b25-92fc-7a06-e39d5f265e91}">
           <p14:sldIdLst>
             <p14:sldId id="263"/>
             <p14:sldId id="264"/>
@@ -146,13 +146,13 @@
             <p14:sldId id="267"/>
           </p14:sldIdLst>
         </p14:section>
-        <p14:section name="Checks" id="{cb972421-8a7c-c973-c728-0bde960d54b6}">
+        <p14:section name="Checks" id="{2445458f-a406-6d89-f53d-aee46129fbf2}">
           <p14:sldIdLst>
             <p14:sldId id="268"/>
             <p14:sldId id="269"/>
           </p14:sldIdLst>
         </p14:section>
-        <p14:section name="Wrap-up" id="{d8e274b5-d57c-b465-6f44-c8b1a76c6135}">
+        <p14:section name="Wrap-up" id="{bb1e6aa4-e5f2-8c74-19f0-5d7afc596ee7}">
           <p14:sldIdLst>
             <p14:sldId id="270"/>
             <p14:sldId id="271"/>
@@ -5990,7 +5990,7 @@
                   <a:schemeClr val="tx2"/>
                 </a:solidFill>
               </a:rPr>
-              <a:t>Board not found, cut off or too small</a:t>
+              <a:t>Board not found or too small</a:t>
             </a:r>
             <a:endParaRPr lang="en-US" sz="1600" dirty="0"/>
           </a:p>
@@ -6007,7 +6007,7 @@
                   <a:schemeClr val="accent1"/>
                 </a:solidFill>
               </a:rPr>
-              <a:t>segmentation failed; valid fraction below 50 percent; mask at the border; under 1,000 pixels</a:t>
+              <a:t>not found; valid fraction below 50 percent; at the border; under 1,000 pixels</a:t>
             </a:r>
             <a:endParaRPr lang="en-US" sz="1600" dirty="0"/>
           </a:p>
@@ -6021,7 +6021,7 @@
                   <a:schemeClr val="tx1"/>
                 </a:solidFill>
               </a:rPr>
-              <a:t>Pose copied wrongly, something flat closer than the board, the board outside the field, or exposure. Too small: the pose is at the sensor's limit; drop it, do not re-capture</a:t>
+              <a:t>Copied wrongly, something flat closer than the board, out of the field, or exposure. Too small: drop the pose</a:t>
             </a:r>
             <a:endParaRPr lang="en-US" sz="1600" dirty="0"/>
           </a:p>
